--- a/backend/CSE7302-Internship Review-5 ppt(rohitha).pptx
+++ b/backend/CSE7302-Internship Review-5 ppt(rohitha).pptx
@@ -5053,7 +5053,7 @@
               </a:rPr>
             </a:br>
             <a:r>
-              <a:rPr lang="en-US" sz="2400" dirty="0" smtClean="0">
+              <a:rPr lang="en-US" sz="2400" smtClean="0">
                 <a:solidFill>
                   <a:schemeClr val="accent1"/>
                 </a:solidFill>
@@ -5061,7 +5061,18 @@
                 <a:ea typeface="Tahoma" pitchFamily="34" charset="0"/>
                 <a:cs typeface="Times New Roman" panose="02020603050405020304" pitchFamily="18" charset="0"/>
               </a:rPr>
-              <a:t>Review-3 Presentation </a:t>
+              <a:t>Review-5 </a:t>
+            </a:r>
+            <a:r>
+              <a:rPr lang="en-US" sz="2400" dirty="0" smtClean="0">
+                <a:solidFill>
+                  <a:schemeClr val="accent1"/>
+                </a:solidFill>
+                <a:latin typeface="Times New Roman" panose="02020603050405020304" pitchFamily="18" charset="0"/>
+                <a:ea typeface="Tahoma" pitchFamily="34" charset="0"/>
+                <a:cs typeface="Times New Roman" panose="02020603050405020304" pitchFamily="18" charset="0"/>
+              </a:rPr>
+              <a:t>Presentation </a:t>
             </a:r>
             <a:br>
               <a:rPr lang="en-US" sz="2400" dirty="0" smtClean="0">
